--- a/chat_course/week09_database/Week09_데이터베이스_SQLite.pptx
+++ b/chat_course/week09_database/Week09_데이터베이스_SQLite.pptx
@@ -1280,7 +1280,7 @@
           <a:p>
             <a:fld id="{5BCAD085-E8A6-8845-BD4E-CB4CCA059FC4}" type="datetimeFigureOut">
               <a:rPr lang="en-US" smtClean="0"/>
-              <a:t>8/13/2026</a:t>
+              <a:t>8/20/2026</a:t>
             </a:fld>
             <a:endParaRPr lang="en-US"/>
           </a:p>
@@ -1448,7 +1448,7 @@
           <a:p>
             <a:fld id="{5BCAD085-E8A6-8845-BD4E-CB4CCA059FC4}" type="datetimeFigureOut">
               <a:rPr lang="en-US" smtClean="0"/>
-              <a:t>8/13/2026</a:t>
+              <a:t>8/20/2026</a:t>
             </a:fld>
             <a:endParaRPr lang="en-US"/>
           </a:p>
@@ -1626,7 +1626,7 @@
           <a:p>
             <a:fld id="{5BCAD085-E8A6-8845-BD4E-CB4CCA059FC4}" type="datetimeFigureOut">
               <a:rPr lang="en-US" smtClean="0"/>
-              <a:t>8/13/2026</a:t>
+              <a:t>8/20/2026</a:t>
             </a:fld>
             <a:endParaRPr lang="en-US"/>
           </a:p>
@@ -1794,7 +1794,7 @@
           <a:p>
             <a:fld id="{5BCAD085-E8A6-8845-BD4E-CB4CCA059FC4}" type="datetimeFigureOut">
               <a:rPr lang="en-US" smtClean="0"/>
-              <a:t>8/13/2026</a:t>
+              <a:t>8/20/2026</a:t>
             </a:fld>
             <a:endParaRPr lang="en-US"/>
           </a:p>
@@ -2039,7 +2039,7 @@
           <a:p>
             <a:fld id="{5BCAD085-E8A6-8845-BD4E-CB4CCA059FC4}" type="datetimeFigureOut">
               <a:rPr lang="en-US" smtClean="0"/>
-              <a:t>8/13/2026</a:t>
+              <a:t>8/20/2026</a:t>
             </a:fld>
             <a:endParaRPr lang="en-US"/>
           </a:p>
@@ -2324,7 +2324,7 @@
           <a:p>
             <a:fld id="{5BCAD085-E8A6-8845-BD4E-CB4CCA059FC4}" type="datetimeFigureOut">
               <a:rPr lang="en-US" smtClean="0"/>
-              <a:t>8/13/2026</a:t>
+              <a:t>8/20/2026</a:t>
             </a:fld>
             <a:endParaRPr lang="en-US"/>
           </a:p>
@@ -2743,7 +2743,7 @@
           <a:p>
             <a:fld id="{5BCAD085-E8A6-8845-BD4E-CB4CCA059FC4}" type="datetimeFigureOut">
               <a:rPr lang="en-US" smtClean="0"/>
-              <a:t>8/13/2026</a:t>
+              <a:t>8/20/2026</a:t>
             </a:fld>
             <a:endParaRPr lang="en-US"/>
           </a:p>
@@ -2860,7 +2860,7 @@
           <a:p>
             <a:fld id="{5BCAD085-E8A6-8845-BD4E-CB4CCA059FC4}" type="datetimeFigureOut">
               <a:rPr lang="en-US" smtClean="0"/>
-              <a:t>8/13/2026</a:t>
+              <a:t>8/20/2026</a:t>
             </a:fld>
             <a:endParaRPr lang="en-US"/>
           </a:p>
@@ -2955,7 +2955,7 @@
           <a:p>
             <a:fld id="{5BCAD085-E8A6-8845-BD4E-CB4CCA059FC4}" type="datetimeFigureOut">
               <a:rPr lang="en-US" smtClean="0"/>
-              <a:t>8/13/2026</a:t>
+              <a:t>8/20/2026</a:t>
             </a:fld>
             <a:endParaRPr lang="en-US"/>
           </a:p>
@@ -3230,7 +3230,7 @@
           <a:p>
             <a:fld id="{5BCAD085-E8A6-8845-BD4E-CB4CCA059FC4}" type="datetimeFigureOut">
               <a:rPr lang="en-US" smtClean="0"/>
-              <a:t>8/13/2026</a:t>
+              <a:t>8/20/2026</a:t>
             </a:fld>
             <a:endParaRPr lang="en-US"/>
           </a:p>
@@ -3482,7 +3482,7 @@
           <a:p>
             <a:fld id="{5BCAD085-E8A6-8845-BD4E-CB4CCA059FC4}" type="datetimeFigureOut">
               <a:rPr lang="en-US" smtClean="0"/>
-              <a:t>8/13/2026</a:t>
+              <a:t>8/20/2026</a:t>
             </a:fld>
             <a:endParaRPr lang="en-US"/>
           </a:p>
@@ -3693,7 +3693,7 @@
           <a:p>
             <a:fld id="{5BCAD085-E8A6-8845-BD4E-CB4CCA059FC4}" type="datetimeFigureOut">
               <a:rPr lang="en-US" smtClean="0"/>
-              <a:t>8/13/2026</a:t>
+              <a:t>8/20/2026</a:t>
             </a:fld>
             <a:endParaRPr lang="en-US"/>
           </a:p>
@@ -8211,25 +8211,6 @@
           <a:bodyPr wrap="square" lIns="274320" tIns="182880" rIns="274320" bIns="182880" rtlCol="0" anchor="t"/>
           <a:lstStyle/>
           <a:p>
-            <a:pPr algn="ctr">
-              <a:lnSpc>
-                <a:spcPct val="100000"/>
-              </a:lnSpc>
-              <a:spcAft>
-                <a:spcPts val="200"/>
-              </a:spcAft>
-            </a:pPr>
-            <a:r>
-              <a:rPr sz="1300" b="0">
-                <a:solidFill>
-                  <a:srgbClr val="EAECF0"/>
-                </a:solidFill>
-                <a:latin typeface="Consolas"/>
-              </a:rPr>
-              <a:t>SELECT u.nickname AS 보낸사람,</a:t>
-            </a:r>
-          </a:p>
-          <a:p>
             <a:pPr>
               <a:lnSpc>
                 <a:spcPct val="100000"/>
@@ -8239,13 +8220,49 @@
               </a:spcAft>
             </a:pPr>
             <a:r>
-              <a:rPr sz="1300" b="0">
+              <a:rPr sz="1300" b="0" dirty="0">
                 <a:solidFill>
                   <a:srgbClr val="EAECF0"/>
                 </a:solidFill>
                 <a:latin typeface="Consolas"/>
               </a:rPr>
-              <a:t>       m.content</a:t>
+              <a:t>SELECT </a:t>
+            </a:r>
+            <a:r>
+              <a:rPr sz="1300" b="0" dirty="0" err="1">
+                <a:solidFill>
+                  <a:srgbClr val="EAECF0"/>
+                </a:solidFill>
+                <a:latin typeface="Consolas"/>
+              </a:rPr>
+              <a:t>u.nickname</a:t>
+            </a:r>
+            <a:r>
+              <a:rPr sz="1300" b="0" dirty="0">
+                <a:solidFill>
+                  <a:srgbClr val="EAECF0"/>
+                </a:solidFill>
+                <a:latin typeface="Consolas"/>
+              </a:rPr>
+              <a:t> AS </a:t>
+            </a:r>
+            <a:r>
+              <a:rPr sz="1300" b="0" dirty="0" err="1">
+                <a:solidFill>
+                  <a:srgbClr val="EAECF0"/>
+                </a:solidFill>
+                <a:latin typeface="Consolas"/>
+              </a:rPr>
+              <a:t>보낸사람</a:t>
+            </a:r>
+            <a:r>
+              <a:rPr sz="1300" b="0" dirty="0">
+                <a:solidFill>
+                  <a:srgbClr val="EAECF0"/>
+                </a:solidFill>
+                <a:latin typeface="Consolas"/>
+              </a:rPr>
+              <a:t>,</a:t>
             </a:r>
           </a:p>
           <a:p>
@@ -8258,14 +8275,29 @@
               </a:spcAft>
             </a:pPr>
             <a:r>
-              <a:rPr sz="1300" b="0">
+              <a:rPr sz="1300" b="0" dirty="0">
                 <a:solidFill>
                   <a:srgbClr val="EAECF0"/>
                 </a:solidFill>
                 <a:latin typeface="Consolas"/>
               </a:rPr>
-              <a:t>FROM   messages m</a:t>
-            </a:r>
+              <a:t>       </a:t>
+            </a:r>
+            <a:r>
+              <a:rPr sz="1300" b="0" dirty="0" err="1">
+                <a:solidFill>
+                  <a:srgbClr val="EAECF0"/>
+                </a:solidFill>
+                <a:latin typeface="Consolas"/>
+              </a:rPr>
+              <a:t>m.content</a:t>
+            </a:r>
+            <a:endParaRPr sz="1300" b="0" dirty="0">
+              <a:solidFill>
+                <a:srgbClr val="EAECF0"/>
+              </a:solidFill>
+              <a:latin typeface="Consolas"/>
+            </a:endParaRPr>
           </a:p>
           <a:p>
             <a:pPr>
@@ -8277,13 +8309,13 @@
               </a:spcAft>
             </a:pPr>
             <a:r>
-              <a:rPr sz="1300" b="0">
+              <a:rPr sz="1300" b="0" dirty="0">
                 <a:solidFill>
                   <a:srgbClr val="EAECF0"/>
                 </a:solidFill>
                 <a:latin typeface="Consolas"/>
               </a:rPr>
-              <a:t>JOIN   users u</a:t>
+              <a:t>FROM   messages m</a:t>
             </a:r>
           </a:p>
           <a:p>
@@ -8296,13 +8328,13 @@
               </a:spcAft>
             </a:pPr>
             <a:r>
-              <a:rPr sz="1300" b="0">
+              <a:rPr sz="1300" b="0" dirty="0">
                 <a:solidFill>
                   <a:srgbClr val="EAECF0"/>
                 </a:solidFill>
                 <a:latin typeface="Consolas"/>
               </a:rPr>
-              <a:t>  ON m.user_id = u.user_id</a:t>
+              <a:t>JOIN   users u</a:t>
             </a:r>
           </a:p>
           <a:p>
@@ -8315,13 +8347,83 @@
               </a:spcAft>
             </a:pPr>
             <a:r>
-              <a:rPr sz="1300" b="0">
+              <a:rPr sz="1300" b="0" dirty="0">
                 <a:solidFill>
                   <a:srgbClr val="EAECF0"/>
                 </a:solidFill>
                 <a:latin typeface="Consolas"/>
               </a:rPr>
-              <a:t>WHERE  m.room_id = 1;</a:t>
+              <a:t>  ON </a:t>
+            </a:r>
+            <a:r>
+              <a:rPr sz="1300" b="0" dirty="0" err="1">
+                <a:solidFill>
+                  <a:srgbClr val="EAECF0"/>
+                </a:solidFill>
+                <a:latin typeface="Consolas"/>
+              </a:rPr>
+              <a:t>m.user_id</a:t>
+            </a:r>
+            <a:r>
+              <a:rPr sz="1300" b="0" dirty="0">
+                <a:solidFill>
+                  <a:srgbClr val="EAECF0"/>
+                </a:solidFill>
+                <a:latin typeface="Consolas"/>
+              </a:rPr>
+              <a:t> = </a:t>
+            </a:r>
+            <a:r>
+              <a:rPr sz="1300" b="0" dirty="0" err="1">
+                <a:solidFill>
+                  <a:srgbClr val="EAECF0"/>
+                </a:solidFill>
+                <a:latin typeface="Consolas"/>
+              </a:rPr>
+              <a:t>u.user_id</a:t>
+            </a:r>
+            <a:endParaRPr sz="1300" b="0" dirty="0">
+              <a:solidFill>
+                <a:srgbClr val="EAECF0"/>
+              </a:solidFill>
+              <a:latin typeface="Consolas"/>
+            </a:endParaRPr>
+          </a:p>
+          <a:p>
+            <a:pPr>
+              <a:lnSpc>
+                <a:spcPct val="100000"/>
+              </a:lnSpc>
+              <a:spcAft>
+                <a:spcPts val="200"/>
+              </a:spcAft>
+            </a:pPr>
+            <a:r>
+              <a:rPr sz="1300" b="0" dirty="0">
+                <a:solidFill>
+                  <a:srgbClr val="EAECF0"/>
+                </a:solidFill>
+                <a:latin typeface="Consolas"/>
+              </a:rPr>
+              <a:t>WHERE  </a:t>
+            </a:r>
+            <a:r>
+              <a:rPr sz="1300" b="0" dirty="0" err="1">
+                <a:solidFill>
+                  <a:srgbClr val="EAECF0"/>
+                </a:solidFill>
+                <a:latin typeface="Consolas"/>
+              </a:rPr>
+              <a:t>m.room_id</a:t>
+            </a:r>
+            <a:r>
+              <a:rPr sz="1300" b="0" dirty="0">
+                <a:solidFill>
+                  <a:srgbClr val="EAECF0"/>
+                </a:solidFill>
+                <a:latin typeface="Consolas"/>
+              </a:rPr>
+              <a:t> = 1;</a:t>
             </a:r>
           </a:p>
         </p:txBody>
@@ -8424,25 +8526,6 @@
           <a:bodyPr wrap="square" lIns="274320" tIns="182880" rIns="274320" bIns="182880" rtlCol="0" anchor="t"/>
           <a:lstStyle/>
           <a:p>
-            <a:pPr algn="ctr">
-              <a:lnSpc>
-                <a:spcPct val="100000"/>
-              </a:lnSpc>
-              <a:spcAft>
-                <a:spcPts val="200"/>
-              </a:spcAft>
-            </a:pPr>
-            <a:r>
-              <a:rPr sz="1300" b="0">
-                <a:solidFill>
-                  <a:srgbClr val="EAECF0"/>
-                </a:solidFill>
-                <a:latin typeface="Consolas"/>
-              </a:rPr>
-              <a:t>보낸사람 │ content</a:t>
-            </a:r>
-          </a:p>
-          <a:p>
             <a:pPr>
               <a:lnSpc>
                 <a:spcPct val="100000"/>
@@ -8452,13 +8535,22 @@
               </a:spcAft>
             </a:pPr>
             <a:r>
-              <a:rPr sz="1300" b="0">
+              <a:rPr sz="1300" b="0" dirty="0" err="1">
                 <a:solidFill>
                   <a:srgbClr val="EAECF0"/>
                 </a:solidFill>
                 <a:latin typeface="Consolas"/>
               </a:rPr>
-              <a:t>─────────────────</a:t>
+              <a:t>보낸사람</a:t>
+            </a:r>
+            <a:r>
+              <a:rPr sz="1300" b="0" dirty="0">
+                <a:solidFill>
+                  <a:srgbClr val="EAECF0"/>
+                </a:solidFill>
+                <a:latin typeface="Consolas"/>
+              </a:rPr>
+              <a:t> │ content</a:t>
             </a:r>
           </a:p>
           <a:p>
@@ -8471,13 +8563,13 @@
               </a:spcAft>
             </a:pPr>
             <a:r>
-              <a:rPr sz="1300" b="0">
+              <a:rPr sz="1300" b="0" dirty="0">
                 <a:solidFill>
                   <a:srgbClr val="EAECF0"/>
                 </a:solidFill>
                 <a:latin typeface="Consolas"/>
               </a:rPr>
-              <a:t>철수    │ 얘들아 안녕</a:t>
+              <a:t>─────────────────</a:t>
             </a:r>
           </a:p>
           <a:p>
@@ -8490,14 +8582,56 @@
               </a:spcAft>
             </a:pPr>
             <a:r>
-              <a:rPr sz="1300" b="0">
+              <a:rPr sz="1300" b="0" dirty="0" err="1">
                 <a:solidFill>
                   <a:srgbClr val="EAECF0"/>
                 </a:solidFill>
                 <a:latin typeface="Consolas"/>
               </a:rPr>
-              <a:t>영희    │ 안녕 철수</a:t>
-            </a:r>
+              <a:t>철수</a:t>
+            </a:r>
+            <a:r>
+              <a:rPr sz="1300" b="0" dirty="0">
+                <a:solidFill>
+                  <a:srgbClr val="EAECF0"/>
+                </a:solidFill>
+                <a:latin typeface="Consolas"/>
+              </a:rPr>
+              <a:t>    │ </a:t>
+            </a:r>
+            <a:r>
+              <a:rPr sz="1300" b="0" dirty="0" err="1">
+                <a:solidFill>
+                  <a:srgbClr val="EAECF0"/>
+                </a:solidFill>
+                <a:latin typeface="Consolas"/>
+              </a:rPr>
+              <a:t>얘들아</a:t>
+            </a:r>
+            <a:r>
+              <a:rPr sz="1300" b="0" dirty="0">
+                <a:solidFill>
+                  <a:srgbClr val="EAECF0"/>
+                </a:solidFill>
+                <a:latin typeface="Consolas"/>
+              </a:rPr>
+              <a:t> </a:t>
+            </a:r>
+            <a:r>
+              <a:rPr sz="1300" b="0" dirty="0" err="1">
+                <a:solidFill>
+                  <a:srgbClr val="EAECF0"/>
+                </a:solidFill>
+                <a:latin typeface="Consolas"/>
+              </a:rPr>
+              <a:t>안녕</a:t>
+            </a:r>
+            <a:endParaRPr sz="1300" b="0" dirty="0">
+              <a:solidFill>
+                <a:srgbClr val="EAECF0"/>
+              </a:solidFill>
+              <a:latin typeface="Consolas"/>
+            </a:endParaRPr>
           </a:p>
           <a:p>
             <a:pPr>
@@ -8509,14 +8643,56 @@
               </a:spcAft>
             </a:pPr>
             <a:r>
-              <a:rPr sz="1300" b="0">
+              <a:rPr sz="1300" b="0" dirty="0" err="1">
                 <a:solidFill>
                   <a:srgbClr val="EAECF0"/>
                 </a:solidFill>
                 <a:latin typeface="Consolas"/>
               </a:rPr>
-              <a:t>영희    │ smile</a:t>
-            </a:r>
+              <a:t>영희</a:t>
+            </a:r>
+            <a:r>
+              <a:rPr sz="1300" b="0" dirty="0">
+                <a:solidFill>
+                  <a:srgbClr val="EAECF0"/>
+                </a:solidFill>
+                <a:latin typeface="Consolas"/>
+              </a:rPr>
+              <a:t>    │ </a:t>
+            </a:r>
+            <a:r>
+              <a:rPr sz="1300" b="0" dirty="0" err="1">
+                <a:solidFill>
+                  <a:srgbClr val="EAECF0"/>
+                </a:solidFill>
+                <a:latin typeface="Consolas"/>
+              </a:rPr>
+              <a:t>안녕</a:t>
+            </a:r>
+            <a:r>
+              <a:rPr sz="1300" b="0" dirty="0">
+                <a:solidFill>
+                  <a:srgbClr val="EAECF0"/>
+                </a:solidFill>
+                <a:latin typeface="Consolas"/>
+              </a:rPr>
+              <a:t> </a:t>
+            </a:r>
+            <a:r>
+              <a:rPr sz="1300" b="0" dirty="0" err="1">
+                <a:solidFill>
+                  <a:srgbClr val="EAECF0"/>
+                </a:solidFill>
+                <a:latin typeface="Consolas"/>
+              </a:rPr>
+              <a:t>철수</a:t>
+            </a:r>
+            <a:endParaRPr sz="1300" b="0" dirty="0">
+              <a:solidFill>
+                <a:srgbClr val="EAECF0"/>
+              </a:solidFill>
+              <a:latin typeface="Consolas"/>
+            </a:endParaRPr>
           </a:p>
           <a:p>
             <a:pPr>
@@ -8528,13 +8704,22 @@
               </a:spcAft>
             </a:pPr>
             <a:r>
-              <a:rPr sz="1300" b="0">
+              <a:rPr sz="1300" b="0" dirty="0" err="1">
                 <a:solidFill>
                   <a:srgbClr val="EAECF0"/>
                 </a:solidFill>
                 <a:latin typeface="Consolas"/>
               </a:rPr>
-              <a:t> </a:t>
+              <a:t>영희</a:t>
+            </a:r>
+            <a:r>
+              <a:rPr sz="1300" b="0" dirty="0">
+                <a:solidFill>
+                  <a:srgbClr val="EAECF0"/>
+                </a:solidFill>
+                <a:latin typeface="Consolas"/>
+              </a:rPr>
+              <a:t>    │ smile</a:t>
             </a:r>
           </a:p>
           <a:p>
@@ -8547,13 +8732,13 @@
               </a:spcAft>
             </a:pPr>
             <a:r>
-              <a:rPr sz="1300" b="0">
+              <a:rPr sz="1300" b="0" dirty="0">
                 <a:solidFill>
                   <a:srgbClr val="EAECF0"/>
                 </a:solidFill>
                 <a:latin typeface="Consolas"/>
               </a:rPr>
-              <a:t>→ 숫자(user_id)가</a:t>
+              <a:t> </a:t>
             </a:r>
           </a:p>
           <a:p>
@@ -8566,14 +8751,102 @@
               </a:spcAft>
             </a:pPr>
             <a:r>
-              <a:rPr sz="1300" b="0">
+              <a:rPr sz="1300" b="0" dirty="0">
                 <a:solidFill>
                   <a:srgbClr val="EAECF0"/>
                 </a:solidFill>
                 <a:latin typeface="Consolas"/>
               </a:rPr>
-              <a:t>  닉네임으로 이어졌다</a:t>
-            </a:r>
+              <a:t>→ </a:t>
+            </a:r>
+            <a:r>
+              <a:rPr sz="1300" b="0" dirty="0" err="1">
+                <a:solidFill>
+                  <a:srgbClr val="EAECF0"/>
+                </a:solidFill>
+                <a:latin typeface="Consolas"/>
+              </a:rPr>
+              <a:t>숫자</a:t>
+            </a:r>
+            <a:r>
+              <a:rPr sz="1300" b="0" dirty="0">
+                <a:solidFill>
+                  <a:srgbClr val="EAECF0"/>
+                </a:solidFill>
+                <a:latin typeface="Consolas"/>
+              </a:rPr>
+              <a:t>(</a:t>
+            </a:r>
+            <a:r>
+              <a:rPr sz="1300" b="0" dirty="0" err="1">
+                <a:solidFill>
+                  <a:srgbClr val="EAECF0"/>
+                </a:solidFill>
+                <a:latin typeface="Consolas"/>
+              </a:rPr>
+              <a:t>user_id</a:t>
+            </a:r>
+            <a:r>
+              <a:rPr sz="1300" b="0" dirty="0">
+                <a:solidFill>
+                  <a:srgbClr val="EAECF0"/>
+                </a:solidFill>
+                <a:latin typeface="Consolas"/>
+              </a:rPr>
+              <a:t>)가</a:t>
+            </a:r>
+          </a:p>
+          <a:p>
+            <a:pPr>
+              <a:lnSpc>
+                <a:spcPct val="100000"/>
+              </a:lnSpc>
+              <a:spcAft>
+                <a:spcPts val="200"/>
+              </a:spcAft>
+            </a:pPr>
+            <a:r>
+              <a:rPr sz="1300" b="0" dirty="0">
+                <a:solidFill>
+                  <a:srgbClr val="EAECF0"/>
+                </a:solidFill>
+                <a:latin typeface="Consolas"/>
+              </a:rPr>
+              <a:t>  </a:t>
+            </a:r>
+            <a:r>
+              <a:rPr sz="1300" b="0" dirty="0" err="1">
+                <a:solidFill>
+                  <a:srgbClr val="EAECF0"/>
+                </a:solidFill>
+                <a:latin typeface="Consolas"/>
+              </a:rPr>
+              <a:t>닉네임으로</a:t>
+            </a:r>
+            <a:r>
+              <a:rPr sz="1300" b="0" dirty="0">
+                <a:solidFill>
+                  <a:srgbClr val="EAECF0"/>
+                </a:solidFill>
+                <a:latin typeface="Consolas"/>
+              </a:rPr>
+              <a:t> </a:t>
+            </a:r>
+            <a:r>
+              <a:rPr sz="1300" b="0" dirty="0" err="1">
+                <a:solidFill>
+                  <a:srgbClr val="EAECF0"/>
+                </a:solidFill>
+                <a:latin typeface="Consolas"/>
+              </a:rPr>
+              <a:t>이어졌다</a:t>
+            </a:r>
+            <a:endParaRPr sz="1300" b="0" dirty="0">
+              <a:solidFill>
+                <a:srgbClr val="EAECF0"/>
+              </a:solidFill>
+              <a:latin typeface="Consolas"/>
+            </a:endParaRPr>
           </a:p>
         </p:txBody>
       </p:sp>
